--- a/report/WNV_Project2_Slide.pptx
+++ b/report/WNV_Project2_Slide.pptx
@@ -1171,7 +1171,7 @@
           <a:p>
             <a:r>
               <a:rPr lang="en-US" dirty="0"/>
-              <a:t>Our question: can the mosquito photos people post to iNaturalist for biodiversity reasons act as an early signal of West Nile virus? We matched 75,798 sightings from 2016–2025 to CDC case data. Nationally there is a loose link: seasons with more mosquito sightings than usual were worse West Nile seasons. But within a state, a mosquito-heavy spring did not predict a worse season, a crane-fly placebo behaved the same, and adding sightings to a state’s own history made forecasts slightly worse. The likely reason is what people photograph: only 10% of sightings are Culex, the main carrier, and Culex sightings peak in October, after the August peak in human cases.</a:t>
+              <a:t>Our question: can the mosquito photos people post to iNaturalist for biodiversity reasons act as an early signal of West Nile virus? We matched 75,798 sightings from 2016–2025 to CDC case data. Nationally there is a loose link: seasons with more mosquito sightings than usual were worse West Nile seasons. But within a state, a mosquito-heavy spring did not predict a worse season, a crane-fly placebo behaved the same, and adding sightings to a state’s own history made forecasts slightly worse. The likely reason is what people photograph: only 10% of sightings are Culex, the main carrier, and Culex sightings peak in October, after the August peak in human cases. Weekly county data from California and Texas did not change the picture: California showed no clear lead, and Texas showed only a small link to mosquito pools, not in the counties with the most pools.</a:t>
             </a:r>
             <a:endParaRPr lang="en-US" dirty="0"/>
           </a:p>
@@ -1907,7 +1907,7 @@
         <p:spPr>
           <a:xfrm>
             <a:off x="1325880" y="2057400"/>
-            <a:ext cx="5257800" cy="685800"/>
+            <a:ext cx="5257800" cy="566928"/>
           </a:xfrm>
           <a:prstGeom prst="rect">
             <a:avLst/>
@@ -1942,7 +1942,7 @@
         </p:nvSpPr>
         <p:spPr>
           <a:xfrm>
-            <a:off x="548640" y="2880360"/>
+            <a:off x="548640" y="2606040"/>
             <a:ext cx="566928" cy="566928"/>
           </a:xfrm>
           <a:prstGeom prst="ellipse">
@@ -1975,7 +1975,7 @@
         </p:blipFill>
         <p:spPr>
           <a:xfrm>
-            <a:off x="676656" y="3008376"/>
+            <a:off x="676656" y="2734056"/>
             <a:ext cx="310896" cy="310896"/>
           </a:xfrm>
           <a:prstGeom prst="rect">
@@ -1991,7 +1991,7 @@
         </p:nvSpPr>
         <p:spPr>
           <a:xfrm>
-            <a:off x="1325880" y="2862072"/>
+            <a:off x="1325880" y="2587752"/>
             <a:ext cx="5257800" cy="365760"/>
           </a:xfrm>
           <a:prstGeom prst="rect">
@@ -2030,8 +2030,8 @@
         </p:nvSpPr>
         <p:spPr>
           <a:xfrm>
-            <a:off x="1325880" y="3246120"/>
-            <a:ext cx="5257800" cy="685800"/>
+            <a:off x="1325880" y="2971800"/>
+            <a:ext cx="5257800" cy="566928"/>
           </a:xfrm>
           <a:prstGeom prst="rect">
             <a:avLst/>
@@ -2066,7 +2066,7 @@
         </p:nvSpPr>
         <p:spPr>
           <a:xfrm>
-            <a:off x="548640" y="4069080"/>
+            <a:off x="548640" y="3520440"/>
             <a:ext cx="566928" cy="566928"/>
           </a:xfrm>
           <a:prstGeom prst="ellipse">
@@ -2099,7 +2099,7 @@
         </p:blipFill>
         <p:spPr>
           <a:xfrm>
-            <a:off x="676656" y="4197096"/>
+            <a:off x="676656" y="3648456"/>
             <a:ext cx="310896" cy="310896"/>
           </a:xfrm>
           <a:prstGeom prst="rect">
@@ -2115,7 +2115,7 @@
         </p:nvSpPr>
         <p:spPr>
           <a:xfrm>
-            <a:off x="1325880" y="4050792"/>
+            <a:off x="1325880" y="3502152"/>
             <a:ext cx="5257800" cy="365760"/>
           </a:xfrm>
           <a:prstGeom prst="rect">
@@ -2154,8 +2154,8 @@
         </p:nvSpPr>
         <p:spPr>
           <a:xfrm>
-            <a:off x="1325880" y="4434840"/>
-            <a:ext cx="5257800" cy="685800"/>
+            <a:off x="1325880" y="3886200"/>
+            <a:ext cx="5257800" cy="566928"/>
           </a:xfrm>
           <a:prstGeom prst="rect">
             <a:avLst/>
@@ -2177,6 +2177,130 @@
                 </a:solidFill>
               </a:rPr>
               <a:t>Adding sightings to each state’s own history made its forecasts slightly worse, not better.</a:t>
+            </a:r>
+            <a:endParaRPr lang="en-US" sz="1400" dirty="0"/>
+          </a:p>
+        </p:txBody>
+      </p:sp>
+      <p:sp>
+        <p:nvSpPr>
+          <p:cNvPr id="22" name="verdict-4-circle"/>
+          <p:cNvSpPr/>
+          <p:nvPr/>
+        </p:nvSpPr>
+        <p:spPr>
+          <a:xfrm>
+            <a:off x="548640" y="4434840"/>
+            <a:ext cx="566928" cy="566928"/>
+          </a:xfrm>
+          <a:prstGeom prst="ellipse">
+            <a:avLst/>
+          </a:prstGeom>
+          <a:solidFill>
+            <a:schemeClr val="tx2"/>
+          </a:solidFill>
+          <a:ln w="19050">
+            <a:solidFill>
+              <a:schemeClr val="accent1"/>
+            </a:solidFill>
+            <a:prstDash val="solid"/>
+          </a:ln>
+        </p:spPr>
+      </p:sp>
+      <p:pic>
+        <p:nvPicPr>
+          <p:cNvPr id="23" name="verdict-4-icon" descr="calendar icon">    </p:cNvPr>
+          <p:cNvPicPr>
+            <a:picLocks noChangeAspect="1"/>
+          </p:cNvPicPr>
+          <p:nvPr/>
+        </p:nvPicPr>
+        <p:blipFill>
+          <a:blip r:embed="rId7"/>
+          <a:stretch>
+            <a:fillRect/>
+          </a:stretch>
+        </p:blipFill>
+        <p:spPr>
+          <a:xfrm>
+            <a:off x="676656" y="4562856"/>
+            <a:ext cx="310896" cy="310896"/>
+          </a:xfrm>
+          <a:prstGeom prst="rect">
+            <a:avLst/>
+          </a:prstGeom>
+        </p:spPr>
+      </p:pic>
+      <p:sp>
+        <p:nvSpPr>
+          <p:cNvPr id="24" name="verdict-4-head"/>
+          <p:cNvSpPr txBox="1"/>
+          <p:nvPr/>
+        </p:nvSpPr>
+        <p:spPr>
+          <a:xfrm>
+            <a:off x="1325880" y="4416552"/>
+            <a:ext cx="5257800" cy="365760"/>
+          </a:xfrm>
+          <a:prstGeom prst="rect">
+            <a:avLst/>
+          </a:prstGeom>
+          <a:noFill/>
+          <a:ln/>
+        </p:spPr>
+        <p:txBody>
+          <a:bodyPr wrap="square" lIns="0" tIns="0" rIns="0" bIns="0" rtlCol="0" anchor="t"/>
+          <a:lstStyle/>
+          <a:p>
+            <a:pPr indent="0" marL="0">
+              <a:buNone/>
+            </a:pPr>
+            <a:r>
+              <a:rPr lang="en-US" sz="1800" b="1" dirty="0">
+                <a:solidFill>
+                  <a:schemeClr val="bg1"/>
+                </a:solidFill>
+                <a:latin typeface="Cambria" pitchFamily="34" charset="0"/>
+                <a:ea typeface="Cambria" pitchFamily="34" charset="-122"/>
+                <a:cs typeface="Cambria" pitchFamily="34" charset="-120"/>
+              </a:rPr>
+              <a:t>Weekly data: no early warning</a:t>
+            </a:r>
+            <a:endParaRPr lang="en-US" sz="1800" dirty="0"/>
+          </a:p>
+        </p:txBody>
+      </p:sp>
+      <p:sp>
+        <p:nvSpPr>
+          <p:cNvPr id="25" name="verdict-4-body"/>
+          <p:cNvSpPr txBox="1"/>
+          <p:nvPr/>
+        </p:nvSpPr>
+        <p:spPr>
+          <a:xfrm>
+            <a:off x="1325880" y="4800600"/>
+            <a:ext cx="5257800" cy="566928"/>
+          </a:xfrm>
+          <a:prstGeom prst="rect">
+            <a:avLst/>
+          </a:prstGeom>
+          <a:noFill/>
+          <a:ln/>
+        </p:spPr>
+        <p:txBody>
+          <a:bodyPr wrap="square" lIns="0" tIns="0" rIns="0" bIns="0" rtlCol="0" anchor="t"/>
+          <a:lstStyle/>
+          <a:p>
+            <a:pPr indent="0" marL="0">
+              <a:buNone/>
+            </a:pPr>
+            <a:r>
+              <a:rPr lang="en-US" sz="1400" dirty="0">
+                <a:solidFill>
+                  <a:schemeClr val="bg1"/>
+                </a:solidFill>
+              </a:rPr>
+              <a:t>California showed no clear lead. Texas showed a small link to mosquito pools, but not where pools are most common.</a:t>
             </a:r>
             <a:endParaRPr lang="en-US" sz="1400" dirty="0"/>
           </a:p>
